--- a/public/fun/pack/pptx/familypro/가족소개프리미엄_11_우리부부_플럼샴페인.pptx
+++ b/public/fun/pack/pptx/familypro/가족소개프리미엄_11_우리부부_플럼샴페인.pptx
@@ -113,12 +113,12 @@
   <p:extLst>
     <p:ext uri="{521415D9-36F7-43E2-AB2F-B90AF26B5E84}">
       <p14:sectionLst xmlns:p14="http://schemas.microsoft.com/office/powerpoint/2010/main">
-        <p14:section name="시작" id="{763664BC-3F06-4CFC-A361-769A57730960}">
+        <p14:section name="시작" id="{BD7A458A-6AC0-4C2F-81A9-8C9D4489F8FD}">
           <p14:sldIdLst>
             <p14:sldId id="256"/>
           </p14:sldIdLst>
         </p14:section>
-        <p14:section name="본문" id="{EFF46280-A8F4-40FB-988A-156840E7CF14}">
+        <p14:section name="본문" id="{A7F5566E-D842-4DC2-AE37-9BCA53AAD269}">
           <p14:sldIdLst>
             <p14:sldId id="257"/>
             <p14:sldId id="258"/>
@@ -127,7 +127,7 @@
             <p14:sldId id="261"/>
           </p14:sldIdLst>
         </p14:section>
-        <p14:section name="마무리" id="{7D8C8BBB-5BE3-48CF-80B6-F47011A12CEC}">
+        <p14:section name="마무리" id="{72C6B923-FCAC-4451-9592-F86B50EF5980}">
           <p14:sldIdLst>
             <p14:sldId id="262"/>
           </p14:sldIdLst>
@@ -1459,7 +1459,7 @@
             </a:lvl1pPr>
           </a:lstStyle>
           <a:p>
-            <a:fld id="{F29BDA4F-072B-40A1-BDDC-016B638D72BE}" type="slidenum">
+            <a:fld id="{6921E8CD-B155-4272-AB6E-E48D4B19A2C2}" type="slidenum">
               <a:rPr lang="en-US"/>
               <a:t>‹#›</a:t>
             </a:fld>
@@ -2126,7 +2126,7 @@
             </a:lvl1pPr>
           </a:lstStyle>
           <a:p>
-            <a:fld id="{CF5B77E6-0417-4EDB-BE13-B3C9A5D6A21F}" type="slidenum">
+            <a:fld id="{8D88F354-B019-42E6-AF82-C2C43ECC8DF4}" type="slidenum">
               <a:rPr lang="en-US"/>
               <a:t>‹#›</a:t>
             </a:fld>
@@ -2872,7 +2872,7 @@
             </a:lvl1pPr>
           </a:lstStyle>
           <a:p>
-            <a:fld id="{3F4457D4-B594-4067-B146-79037C32C9D8}" type="slidenum">
+            <a:fld id="{0588F4F0-996C-404E-B4C9-A8A10129C6B3}" type="slidenum">
               <a:rPr lang="en-US"/>
               <a:t>‹#›</a:t>
             </a:fld>
@@ -3757,7 +3757,7 @@
           <a:p>
             <a:r>
               <a:rPr lang="ko-KR"/>
-              <a:t>우리 부부 · 0000. 00. 00</a:t>
+              <a:t>우리 부부 · 날짜 입력</a:t>
             </a:r>
           </a:p>
         </p:txBody>
@@ -4000,7 +4000,7 @@
           <a:bodyPr/>
           <a:lstStyle/>
           <a:p>
-            <a:fld id="{28217F39-6ECB-4266-8440-90AFEFFC2D50}" type="slidenum">
+            <a:fld id="{AC2A75D1-7CE3-4094-A43C-60E15A5741B8}" type="slidenum">
               <a:rPr lang="en-US"/>
               <a:t>‹#›</a:t>
             </a:fld>
@@ -4424,7 +4424,7 @@
           <a:bodyPr/>
           <a:lstStyle/>
           <a:p>
-            <a:fld id="{804EDAC1-6216-413C-842D-0A8963488754}" type="slidenum">
+            <a:fld id="{AD48686D-2AFE-45E5-B3F4-099E38B0B07B}" type="slidenum">
               <a:rPr lang="en-US"/>
               <a:t>‹#›</a:t>
             </a:fld>
@@ -5288,7 +5288,7 @@
           <a:bodyPr/>
           <a:lstStyle/>
           <a:p>
-            <a:fld id="{1CAC8DC0-B145-45D9-B5D8-78B49AB3AE7D}" type="slidenum">
+            <a:fld id="{7A382F6E-E881-4A30-91D3-752D5565E0FB}" type="slidenum">
               <a:rPr lang="en-US"/>
               <a:t>‹#›</a:t>
             </a:fld>
@@ -6577,7 +6577,7 @@
           <a:bodyPr/>
           <a:lstStyle/>
           <a:p>
-            <a:fld id="{CCCFE22E-B983-4DC7-B21B-0A4A85011CA3}" type="slidenum">
+            <a:fld id="{1FE5383D-2CB4-4B5C-BE87-5C75927BEC52}" type="slidenum">
               <a:rPr lang="en-US"/>
               <a:t>‹#›</a:t>
             </a:fld>
@@ -6687,7 +6687,7 @@
           <a:bodyPr/>
           <a:lstStyle/>
           <a:p>
-            <a:fld id="{71C7666A-1004-4CB5-8005-EFC388BF96C3}" type="slidenum">
+            <a:fld id="{5C4C9C47-E197-4DE1-A33D-3DE4889DD37D}" type="slidenum">
               <a:rPr lang="en-US"/>
               <a:t>‹#›</a:t>
             </a:fld>
